--- a/exports/pptx/lessons/primary-module-08-yoga/day-05-bumblebee.pptx
+++ b/exports/pptx/lessons/primary-module-08-yoga/day-05-bumblebee.pptx
@@ -16,9 +16,11 @@
     <p:sldId id="264" r:id="rId10"/>
     <p:sldId id="265" r:id="rId11"/>
     <p:sldId id="266" r:id="rId12"/>
+    <p:sldId id="267" r:id="rId13"/>
+    <p:sldId id="268" r:id="rId14"/>
   </p:sldIdLst>
   <p:notesMasterIdLst>
-    <p:notesMasterId r:id="rId13"/>
+    <p:notesMasterId r:id="rId15"/>
   </p:notesMasterIdLst>
   <p:sldSz cx="9144000" cy="5143500"/>
   <p:notesSz cx="5143500" cy="9144000"/>
@@ -712,6 +714,182 @@
             <a:fld id="{F7021451-1387-4CA6-816F-3879F97B5CBC}" type="slidenum">
               <a:rPr lang="en-US"/>
               <a:t>11</a:t>
+            </a:fld>
+            <a:endParaRPr lang="en-US"/>
+          </a:p>
+        </p:txBody>
+      </p:sp>
+    </p:spTree>
+    <p:extLst>
+      <p:ext uri="{BB962C8B-B14F-4D97-AF65-F5344CB8AC3E}">
+        <p14:creationId xmlns:p14="http://schemas.microsoft.com/office/powerpoint/2010/main" val="1024086991"/>
+      </p:ext>
+    </p:extLst>
+  </p:cSld>
+  <p:clrMapOvr>
+    <a:masterClrMapping/>
+  </p:clrMapOvr>
+</p:notes>
+</file>
+
+<file path=ppt/notesSlides/notesSlide12.xml><?xml version="1.0" encoding="utf-8"?>
+<p:notes xmlns:a="http://schemas.openxmlformats.org/drawingml/2006/main" xmlns:r="http://schemas.openxmlformats.org/officeDocument/2006/relationships" xmlns:p="http://schemas.openxmlformats.org/presentationml/2006/main">
+  <p:cSld>
+    <p:spTree>
+      <p:nvGrpSpPr>
+        <p:cNvPr id="1" name=""/>
+        <p:cNvGrpSpPr/>
+        <p:nvPr/>
+      </p:nvGrpSpPr>
+      <p:grpSpPr>
+        <a:xfrm>
+          <a:off x="0" y="0"/>
+          <a:ext cx="0" cy="0"/>
+          <a:chOff x="0" y="0"/>
+          <a:chExt cx="0" cy="0"/>
+        </a:xfrm>
+      </p:grpSpPr>
+      <p:sp>
+        <p:nvSpPr>
+          <p:cNvPr id="2" name="Slide Image Placeholder 1"/>
+          <p:cNvSpPr>
+            <a:spLocks noGrp="1" noRot="1" noChangeAspect="1"/>
+          </p:cNvSpPr>
+          <p:nvPr>
+            <p:ph type="sldImg"/>
+          </p:nvPr>
+        </p:nvSpPr>
+        <p:spPr/>
+      </p:sp>
+      <p:sp>
+        <p:nvSpPr>
+          <p:cNvPr id="3" name="Notes Placeholder 2"/>
+          <p:cNvSpPr>
+            <a:spLocks noGrp="1"/>
+          </p:cNvSpPr>
+          <p:nvPr>
+            <p:ph type="body" idx="1"/>
+          </p:nvPr>
+        </p:nvSpPr>
+        <p:spPr/>
+        <p:txBody>
+          <a:bodyPr/>
+          <a:lstStyle/>
+          <a:p>
+            <a:r>
+              <a:rPr lang="en-US" dirty="0"/>
+              <a:t/>
+            </a:r>
+            <a:endParaRPr lang="en-US" dirty="0"/>
+          </a:p>
+        </p:txBody>
+      </p:sp>
+      <p:sp>
+        <p:nvSpPr>
+          <p:cNvPr id="4" name="Slide Number Placeholder 3"/>
+          <p:cNvSpPr>
+            <a:spLocks noGrp="1"/>
+          </p:cNvSpPr>
+          <p:nvPr>
+            <p:ph type="sldNum" sz="quarter" idx="10"/>
+          </p:nvPr>
+        </p:nvSpPr>
+        <p:spPr/>
+        <p:txBody>
+          <a:bodyPr/>
+          <a:lstStyle/>
+          <a:p>
+            <a:fld id="{F7021451-1387-4CA6-816F-3879F97B5CBC}" type="slidenum">
+              <a:rPr lang="en-US"/>
+              <a:t>12</a:t>
+            </a:fld>
+            <a:endParaRPr lang="en-US"/>
+          </a:p>
+        </p:txBody>
+      </p:sp>
+    </p:spTree>
+    <p:extLst>
+      <p:ext uri="{BB962C8B-B14F-4D97-AF65-F5344CB8AC3E}">
+        <p14:creationId xmlns:p14="http://schemas.microsoft.com/office/powerpoint/2010/main" val="1024086991"/>
+      </p:ext>
+    </p:extLst>
+  </p:cSld>
+  <p:clrMapOvr>
+    <a:masterClrMapping/>
+  </p:clrMapOvr>
+</p:notes>
+</file>
+
+<file path=ppt/notesSlides/notesSlide13.xml><?xml version="1.0" encoding="utf-8"?>
+<p:notes xmlns:a="http://schemas.openxmlformats.org/drawingml/2006/main" xmlns:r="http://schemas.openxmlformats.org/officeDocument/2006/relationships" xmlns:p="http://schemas.openxmlformats.org/presentationml/2006/main">
+  <p:cSld>
+    <p:spTree>
+      <p:nvGrpSpPr>
+        <p:cNvPr id="1" name=""/>
+        <p:cNvGrpSpPr/>
+        <p:nvPr/>
+      </p:nvGrpSpPr>
+      <p:grpSpPr>
+        <a:xfrm>
+          <a:off x="0" y="0"/>
+          <a:ext cx="0" cy="0"/>
+          <a:chOff x="0" y="0"/>
+          <a:chExt cx="0" cy="0"/>
+        </a:xfrm>
+      </p:grpSpPr>
+      <p:sp>
+        <p:nvSpPr>
+          <p:cNvPr id="2" name="Slide Image Placeholder 1"/>
+          <p:cNvSpPr>
+            <a:spLocks noGrp="1" noRot="1" noChangeAspect="1"/>
+          </p:cNvSpPr>
+          <p:nvPr>
+            <p:ph type="sldImg"/>
+          </p:nvPr>
+        </p:nvSpPr>
+        <p:spPr/>
+      </p:sp>
+      <p:sp>
+        <p:nvSpPr>
+          <p:cNvPr id="3" name="Notes Placeholder 2"/>
+          <p:cNvSpPr>
+            <a:spLocks noGrp="1"/>
+          </p:cNvSpPr>
+          <p:nvPr>
+            <p:ph type="body" idx="1"/>
+          </p:nvPr>
+        </p:nvSpPr>
+        <p:spPr/>
+        <p:txBody>
+          <a:bodyPr/>
+          <a:lstStyle/>
+          <a:p>
+            <a:r>
+              <a:rPr lang="en-US" dirty="0"/>
+              <a:t/>
+            </a:r>
+            <a:endParaRPr lang="en-US" dirty="0"/>
+          </a:p>
+        </p:txBody>
+      </p:sp>
+      <p:sp>
+        <p:nvSpPr>
+          <p:cNvPr id="4" name="Slide Number Placeholder 3"/>
+          <p:cNvSpPr>
+            <a:spLocks noGrp="1"/>
+          </p:cNvSpPr>
+          <p:nvPr>
+            <p:ph type="sldNum" sz="quarter" idx="10"/>
+          </p:nvPr>
+        </p:nvSpPr>
+        <p:spPr/>
+        <p:txBody>
+          <a:bodyPr/>
+          <a:lstStyle/>
+          <a:p>
+            <a:fld id="{F7021451-1387-4CA6-816F-3879F97B5CBC}" type="slidenum">
+              <a:rPr lang="en-US"/>
+              <a:t>13</a:t>
             </a:fld>
             <a:endParaRPr lang="en-US"/>
           </a:p>
@@ -1965,148 +2143,6 @@
         </p:nvSpPr>
         <p:spPr>
           <a:xfrm>
-            <a:off x="406301" y="1223963"/>
-            <a:ext cx="8498026" cy="274290"/>
-          </a:xfrm>
-          <a:prstGeom prst="rect">
-            <a:avLst/>
-          </a:prstGeom>
-          <a:noFill/>
-          <a:ln/>
-        </p:spPr>
-        <p:txBody>
-          <a:bodyPr wrap="square" lIns="0" tIns="0" rIns="0" bIns="0" rtlCol="0" anchor="t"/>
-          <a:lstStyle/>
-          <a:p>
-            <a:pPr algn="l" indent="0" marL="0">
-              <a:lnSpc>
-                <a:spcPts val="2160"/>
-              </a:lnSpc>
-              <a:spcBef>
-                <a:spcPts val="600"/>
-              </a:spcBef>
-              <a:spcAft>
-                <a:spcPts val="800"/>
-              </a:spcAft>
-              <a:buNone/>
-            </a:pPr>
-            <a:r>
-              <a:rPr lang="en-US" sz="1800" b="1" dirty="0">
-                <a:solidFill>
-                  <a:srgbClr val="E07A5F"/>
-                </a:solidFill>
-                <a:latin typeface="Georgia" pitchFamily="34" charset="0"/>
-                <a:ea typeface="Georgia" pitchFamily="34" charset="-122"/>
-                <a:cs typeface="Georgia" pitchFamily="34" charset="-120"/>
-              </a:rPr>
-              <a:t>Goal</a:t>
-            </a:r>
-            <a:endParaRPr lang="en-US" sz="1800" dirty="0"/>
-          </a:p>
-        </p:txBody>
-      </p:sp>
-      <p:sp>
-        <p:nvSpPr>
-          <p:cNvPr id="6" name="Text 4"/>
-          <p:cNvSpPr/>
-          <p:nvPr/>
-        </p:nvSpPr>
-        <p:spPr>
-          <a:xfrm>
-            <a:off x="406301" y="1637854"/>
-            <a:ext cx="8498026" cy="213271"/>
-          </a:xfrm>
-          <a:prstGeom prst="rect">
-            <a:avLst/>
-          </a:prstGeom>
-          <a:noFill/>
-          <a:ln/>
-        </p:spPr>
-        <p:txBody>
-          <a:bodyPr wrap="square" lIns="0" tIns="0" rIns="0" bIns="0" rtlCol="0" anchor="t"/>
-          <a:lstStyle/>
-          <a:p>
-            <a:pPr algn="l" indent="0" marL="0">
-              <a:lnSpc>
-                <a:spcPts val="1680"/>
-              </a:lnSpc>
-              <a:spcBef>
-                <a:spcPts val="300"/>
-              </a:spcBef>
-              <a:spcAft>
-                <a:spcPts val="300"/>
-              </a:spcAft>
-              <a:buNone/>
-            </a:pPr>
-            <a:r>
-              <a:rPr lang="en-US" sz="1200" dirty="0">
-                <a:solidFill>
-                  <a:srgbClr val="2C2C2C"/>
-                </a:solidFill>
-                <a:latin typeface="Verdana" pitchFamily="34" charset="0"/>
-                <a:ea typeface="Verdana" pitchFamily="34" charset="-122"/>
-                <a:cs typeface="Verdana" pitchFamily="34" charset="-120"/>
-              </a:rPr>
-              <a:t>Children practise </a:t>
-            </a:r>
-            <a:pPr algn="l" indent="0" marL="0">
-              <a:lnSpc>
-                <a:spcPts val="1680"/>
-              </a:lnSpc>
-              <a:spcBef>
-                <a:spcPts val="300"/>
-              </a:spcBef>
-              <a:spcAft>
-                <a:spcPts val="300"/>
-              </a:spcAft>
-              <a:buNone/>
-            </a:pPr>
-            <a:r>
-              <a:rPr lang="en-US" sz="1200" i="1" dirty="0">
-                <a:solidFill>
-                  <a:srgbClr val="2C2C2C"/>
-                </a:solidFill>
-                <a:latin typeface="Verdana" pitchFamily="34" charset="0"/>
-                <a:ea typeface="Verdana" pitchFamily="34" charset="-122"/>
-                <a:cs typeface="Verdana" pitchFamily="34" charset="-120"/>
-              </a:rPr>
-              <a:t>bhrāmarī</a:t>
-            </a:r>
-            <a:pPr algn="l" indent="0" marL="0">
-              <a:lnSpc>
-                <a:spcPts val="1680"/>
-              </a:lnSpc>
-              <a:spcBef>
-                <a:spcPts val="300"/>
-              </a:spcBef>
-              <a:spcAft>
-                <a:spcPts val="300"/>
-              </a:spcAft>
-              <a:buNone/>
-            </a:pPr>
-            <a:r>
-              <a:rPr lang="en-US" sz="1200" dirty="0">
-                <a:solidFill>
-                  <a:srgbClr val="2C2C2C"/>
-                </a:solidFill>
-                <a:latin typeface="Verdana" pitchFamily="34" charset="0"/>
-                <a:ea typeface="Verdana" pitchFamily="34" charset="-122"/>
-                <a:cs typeface="Verdana" pitchFamily="34" charset="-120"/>
-              </a:rPr>
-              <a:t> — the humming breath — and notice the buzzing sensation.</a:t>
-            </a:r>
-            <a:endParaRPr lang="en-US" sz="1200" dirty="0"/>
-          </a:p>
-        </p:txBody>
-      </p:sp>
-      <p:sp>
-        <p:nvSpPr>
-          <p:cNvPr id="7" name="Text 5"/>
-          <p:cNvSpPr/>
-          <p:nvPr/>
-        </p:nvSpPr>
-        <p:spPr>
-          <a:xfrm>
             <a:off x="406301" y="4434929"/>
             <a:ext cx="8498026" cy="213271"/>
           </a:xfrm>
@@ -2251,7 +2287,7 @@
                 <a:ea typeface="Georgia" pitchFamily="34" charset="-122"/>
                 <a:cs typeface="Georgia" pitchFamily="34" charset="-120"/>
               </a:rPr>
-              <a:t>Differentiation</a:t>
+              <a:t>Close (2 min)</a:t>
             </a:r>
             <a:endParaRPr lang="en-US" sz="1800" dirty="0"/>
           </a:p>
@@ -2265,8 +2301,8 @@
         </p:nvSpPr>
         <p:spPr>
           <a:xfrm>
-            <a:off x="634901" y="883593"/>
-            <a:ext cx="8102798" cy="525661"/>
+            <a:off x="406301" y="870942"/>
+            <a:ext cx="8498026" cy="213271"/>
           </a:xfrm>
           <a:prstGeom prst="rect">
             <a:avLst/>
@@ -2278,18 +2314,20 @@
           <a:bodyPr wrap="square" lIns="0" tIns="0" rIns="0" bIns="0" rtlCol="0" anchor="t"/>
           <a:lstStyle/>
           <a:p>
-            <a:pPr algn="l" marL="342900" indent="-342900">
-              <a:lnSpc>
-                <a:spcPts val="1620"/>
-              </a:lnSpc>
-              <a:spcAft>
-                <a:spcPts val="300"/>
-              </a:spcAft>
-              <a:buSzPct val="100000"/>
-              <a:buChar char="•"/>
-            </a:pPr>
-            <a:r>
-              <a:rPr lang="en-US" sz="1200" b="1" dirty="0">
+            <a:pPr algn="l" indent="0" marL="0">
+              <a:lnSpc>
+                <a:spcPts val="1680"/>
+              </a:lnSpc>
+              <a:spcBef>
+                <a:spcPts val="300"/>
+              </a:spcBef>
+              <a:spcAft>
+                <a:spcPts val="300"/>
+              </a:spcAft>
+              <a:buNone/>
+            </a:pPr>
+            <a:r>
+              <a:rPr lang="en-US" sz="1200" dirty="0">
                 <a:solidFill>
                   <a:srgbClr val="2C2C2C"/>
                 </a:solidFill>
@@ -2297,71 +2335,7 @@
                 <a:ea typeface="Verdana" pitchFamily="34" charset="-122"/>
                 <a:cs typeface="Verdana" pitchFamily="34" charset="-120"/>
               </a:rPr>
-              <a:t>Tier up:</a:t>
-            </a:r>
-            <a:pPr algn="l" indent="0" marL="0">
-              <a:lnSpc>
-                <a:spcPts val="1620"/>
-              </a:lnSpc>
-              <a:spcAft>
-                <a:spcPts val="300"/>
-              </a:spcAft>
-              <a:buNone/>
-            </a:pPr>
-            <a:r>
-              <a:rPr lang="en-US" sz="1200" dirty="0">
-                <a:solidFill>
-                  <a:srgbClr val="2C2C2C"/>
-                </a:solidFill>
-                <a:latin typeface="Verdana" pitchFamily="34" charset="0"/>
-                <a:ea typeface="Verdana" pitchFamily="34" charset="-122"/>
-                <a:cs typeface="Verdana" pitchFamily="34" charset="-120"/>
-              </a:rPr>
-              <a:t> Try 10 rounds. Try a deeper hum.</a:t>
-            </a:r>
-            <a:endParaRPr lang="en-US" sz="1200" dirty="0"/>
-          </a:p>
-          <a:p>
-            <a:pPr algn="l" marL="342900" indent="-342900">
-              <a:lnSpc>
-                <a:spcPts val="1620"/>
-              </a:lnSpc>
-              <a:spcAft>
-                <a:spcPts val="300"/>
-              </a:spcAft>
-              <a:buSzPct val="100000"/>
-              <a:buChar char="•"/>
-            </a:pPr>
-            <a:r>
-              <a:rPr lang="en-US" sz="1200" b="1" dirty="0">
-                <a:solidFill>
-                  <a:srgbClr val="2C2C2C"/>
-                </a:solidFill>
-                <a:latin typeface="Verdana" pitchFamily="34" charset="0"/>
-                <a:ea typeface="Verdana" pitchFamily="34" charset="-122"/>
-                <a:cs typeface="Verdana" pitchFamily="34" charset="-120"/>
-              </a:rPr>
-              <a:t>Tier down:</a:t>
-            </a:r>
-            <a:pPr algn="l" indent="0" marL="0">
-              <a:lnSpc>
-                <a:spcPts val="1620"/>
-              </a:lnSpc>
-              <a:spcAft>
-                <a:spcPts val="300"/>
-              </a:spcAft>
-              <a:buNone/>
-            </a:pPr>
-            <a:r>
-              <a:rPr lang="en-US" sz="1200" dirty="0">
-                <a:solidFill>
-                  <a:srgbClr val="2C2C2C"/>
-                </a:solidFill>
-                <a:latin typeface="Verdana" pitchFamily="34" charset="0"/>
-                <a:ea typeface="Verdana" pitchFamily="34" charset="-122"/>
-                <a:cs typeface="Verdana" pitchFamily="34" charset="-120"/>
-              </a:rPr>
-              <a:t> Just normal slow breathing if humming feels uncomfortable.</a:t>
+              <a:t>Tāḍāsana. Namaste.</a:t>
             </a:r>
             <a:endParaRPr lang="en-US" sz="1200" dirty="0"/>
           </a:p>
@@ -2519,7 +2493,7 @@
                 <a:ea typeface="Georgia" pitchFamily="34" charset="-122"/>
                 <a:cs typeface="Georgia" pitchFamily="34" charset="-120"/>
               </a:rPr>
-              <a:t>Teacher's quick notes</a:t>
+              <a:t>Homework</a:t>
             </a:r>
             <a:endParaRPr lang="en-US" sz="1800" dirty="0"/>
           </a:p>
@@ -2533,8 +2507,8 @@
         </p:nvSpPr>
         <p:spPr>
           <a:xfrm>
-            <a:off x="406301" y="870942"/>
-            <a:ext cx="8498026" cy="639812"/>
+            <a:off x="634901" y="883593"/>
+            <a:ext cx="8102798" cy="281880"/>
           </a:xfrm>
           <a:prstGeom prst="rect">
             <a:avLst/>
@@ -2546,17 +2520,15 @@
           <a:bodyPr wrap="square" lIns="0" tIns="0" rIns="0" bIns="0" rtlCol="0" anchor="t"/>
           <a:lstStyle/>
           <a:p>
-            <a:pPr algn="l" indent="0" marL="0">
-              <a:lnSpc>
-                <a:spcPts val="1680"/>
-              </a:lnSpc>
-              <a:spcBef>
-                <a:spcPts val="300"/>
-              </a:spcBef>
-              <a:spcAft>
-                <a:spcPts val="300"/>
-              </a:spcAft>
-              <a:buNone/>
+            <a:pPr algn="l" marL="342900" indent="-342900">
+              <a:lnSpc>
+                <a:spcPts val="1620"/>
+              </a:lnSpc>
+              <a:spcAft>
+                <a:spcPts val="300"/>
+              </a:spcAft>
+              <a:buSzPct val="100000"/>
+              <a:buChar char="•"/>
             </a:pPr>
             <a:r>
               <a:rPr lang="en-US" sz="1200" dirty="0">
@@ -2567,7 +2539,527 @@
                 <a:ea typeface="Verdana" pitchFamily="34" charset="-122"/>
                 <a:cs typeface="Verdana" pitchFamily="34" charset="-120"/>
               </a:rPr>
-              <a:t>– Asthma alert — if a child has asthma, they do natural breath, no bhrāmarī. – The "buzzing in the head" is a real sensation — vibration calms the nervous system. – Some children won't want to make sound in front of others. They can hum very quietly or just exhale slowly.</a:t>
+              <a:t>5 bumblebee breaths before bedtime tonight. Notice how you feel.</a:t>
+            </a:r>
+            <a:endParaRPr lang="en-US" sz="1200" dirty="0"/>
+          </a:p>
+        </p:txBody>
+      </p:sp>
+      <p:sp>
+        <p:nvSpPr>
+          <p:cNvPr id="5" name="Text 3"/>
+          <p:cNvSpPr/>
+          <p:nvPr/>
+        </p:nvSpPr>
+        <p:spPr>
+          <a:xfrm>
+            <a:off x="406301" y="4434929"/>
+            <a:ext cx="8498026" cy="213271"/>
+          </a:xfrm>
+          <a:prstGeom prst="rect">
+            <a:avLst/>
+          </a:prstGeom>
+          <a:noFill/>
+          <a:ln/>
+        </p:spPr>
+        <p:txBody>
+          <a:bodyPr wrap="square" lIns="0" tIns="0" rIns="0" bIns="0" rtlCol="0" anchor="t"/>
+          <a:lstStyle/>
+          <a:p>
+            <a:pPr algn="l" indent="0" marL="0">
+              <a:lnSpc>
+                <a:spcPts val="1680"/>
+              </a:lnSpc>
+              <a:spcBef>
+                <a:spcPts val="300"/>
+              </a:spcBef>
+              <a:spcAft>
+                <a:spcPts val="300"/>
+              </a:spcAft>
+              <a:buNone/>
+            </a:pPr>
+            <a:r>
+              <a:rPr lang="en-US" sz="1200" dirty="0">
+                <a:solidFill>
+                  <a:srgbClr val="2C2C2C"/>
+                </a:solidFill>
+                <a:latin typeface="Verdana" pitchFamily="34" charset="0"/>
+                <a:ea typeface="Verdana" pitchFamily="34" charset="-122"/>
+                <a:cs typeface="Verdana" pitchFamily="34" charset="-120"/>
+              </a:rPr>
+              <a:t>Primary ·  · IKS Curriculum</a:t>
+            </a:r>
+            <a:endParaRPr lang="en-US" sz="1200" dirty="0"/>
+          </a:p>
+        </p:txBody>
+      </p:sp>
+    </p:spTree>
+  </p:cSld>
+  <p:clrMapOvr>
+    <a:masterClrMapping/>
+  </p:clrMapOvr>
+</p:sld>
+</file>
+
+<file path=ppt/slides/slide12.xml><?xml version="1.0" encoding="utf-8"?>
+<p:sld xmlns:a="http://schemas.openxmlformats.org/drawingml/2006/main" xmlns:r="http://schemas.openxmlformats.org/officeDocument/2006/relationships" xmlns:p="http://schemas.openxmlformats.org/presentationml/2006/main">
+  <p:cSld name="Slide 12">
+    <p:bg>
+      <p:bgPr>
+        <a:solidFill>
+          <a:srgbClr val="FAF7F2"/>
+        </a:solidFill>
+      </p:bgPr>
+    </p:bg>
+    <p:spTree>
+      <p:nvGrpSpPr>
+        <p:cNvPr id="1" name=""/>
+        <p:cNvGrpSpPr/>
+        <p:nvPr/>
+      </p:nvGrpSpPr>
+      <p:grpSpPr>
+        <a:xfrm>
+          <a:off x="0" y="0"/>
+          <a:ext cx="0" cy="0"/>
+          <a:chOff x="0" y="0"/>
+          <a:chExt cx="0" cy="0"/>
+        </a:xfrm>
+      </p:grpSpPr>
+      <p:sp>
+        <p:nvSpPr>
+          <p:cNvPr id="2" name="Text 0"/>
+          <p:cNvSpPr/>
+          <p:nvPr/>
+        </p:nvSpPr>
+        <p:spPr>
+          <a:xfrm>
+            <a:off x="0" y="0"/>
+            <a:ext cx="9144000" cy="101501"/>
+          </a:xfrm>
+          <a:prstGeom prst="rect">
+            <a:avLst/>
+          </a:prstGeom>
+          <a:solidFill>
+            <a:srgbClr val="87A96B"/>
+          </a:solidFill>
+          <a:ln/>
+        </p:spPr>
+        <p:txBody>
+          <a:bodyPr wrap="square" rtlCol="0" anchor="ctr"/>
+          <a:lstStyle/>
+          <a:p>
+            <a:pPr indent="0" marL="0">
+              <a:buNone/>
+            </a:pPr>
+            <a:endParaRPr lang="en-US" dirty="0"/>
+          </a:p>
+        </p:txBody>
+      </p:sp>
+      <p:sp>
+        <p:nvSpPr>
+          <p:cNvPr id="3" name="Text 1"/>
+          <p:cNvSpPr/>
+          <p:nvPr/>
+        </p:nvSpPr>
+        <p:spPr>
+          <a:xfrm>
+            <a:off x="406301" y="457051"/>
+            <a:ext cx="8498026" cy="274290"/>
+          </a:xfrm>
+          <a:prstGeom prst="rect">
+            <a:avLst/>
+          </a:prstGeom>
+          <a:noFill/>
+          <a:ln/>
+        </p:spPr>
+        <p:txBody>
+          <a:bodyPr wrap="square" lIns="0" tIns="0" rIns="0" bIns="0" rtlCol="0" anchor="t"/>
+          <a:lstStyle/>
+          <a:p>
+            <a:pPr algn="l" indent="0" marL="0">
+              <a:lnSpc>
+                <a:spcPts val="2160"/>
+              </a:lnSpc>
+              <a:spcBef>
+                <a:spcPts val="600"/>
+              </a:spcBef>
+              <a:spcAft>
+                <a:spcPts val="800"/>
+              </a:spcAft>
+              <a:buNone/>
+            </a:pPr>
+            <a:r>
+              <a:rPr lang="en-US" sz="1800" b="1" dirty="0">
+                <a:solidFill>
+                  <a:srgbClr val="E07A5F"/>
+                </a:solidFill>
+                <a:latin typeface="Georgia" pitchFamily="34" charset="0"/>
+                <a:ea typeface="Georgia" pitchFamily="34" charset="-122"/>
+                <a:cs typeface="Georgia" pitchFamily="34" charset="-120"/>
+              </a:rPr>
+              <a:t>Differentiation</a:t>
+            </a:r>
+            <a:endParaRPr lang="en-US" sz="1800" dirty="0"/>
+          </a:p>
+        </p:txBody>
+      </p:sp>
+      <p:sp>
+        <p:nvSpPr>
+          <p:cNvPr id="4" name="Text 2"/>
+          <p:cNvSpPr/>
+          <p:nvPr/>
+        </p:nvSpPr>
+        <p:spPr>
+          <a:xfrm>
+            <a:off x="634901" y="883593"/>
+            <a:ext cx="8102798" cy="525661"/>
+          </a:xfrm>
+          <a:prstGeom prst="rect">
+            <a:avLst/>
+          </a:prstGeom>
+          <a:noFill/>
+          <a:ln/>
+        </p:spPr>
+        <p:txBody>
+          <a:bodyPr wrap="square" lIns="0" tIns="0" rIns="0" bIns="0" rtlCol="0" anchor="t"/>
+          <a:lstStyle/>
+          <a:p>
+            <a:pPr algn="l" marL="342900" indent="-342900">
+              <a:lnSpc>
+                <a:spcPts val="1620"/>
+              </a:lnSpc>
+              <a:spcAft>
+                <a:spcPts val="300"/>
+              </a:spcAft>
+              <a:buSzPct val="100000"/>
+              <a:buChar char="•"/>
+            </a:pPr>
+            <a:r>
+              <a:rPr lang="en-US" sz="1200" b="1" dirty="0">
+                <a:solidFill>
+                  <a:srgbClr val="2C2C2C"/>
+                </a:solidFill>
+                <a:latin typeface="Verdana" pitchFamily="34" charset="0"/>
+                <a:ea typeface="Verdana" pitchFamily="34" charset="-122"/>
+                <a:cs typeface="Verdana" pitchFamily="34" charset="-120"/>
+              </a:rPr>
+              <a:t>Tier up:</a:t>
+            </a:r>
+            <a:pPr algn="l" indent="0" marL="0">
+              <a:lnSpc>
+                <a:spcPts val="1620"/>
+              </a:lnSpc>
+              <a:spcAft>
+                <a:spcPts val="300"/>
+              </a:spcAft>
+              <a:buNone/>
+            </a:pPr>
+            <a:r>
+              <a:rPr lang="en-US" sz="1200" dirty="0">
+                <a:solidFill>
+                  <a:srgbClr val="2C2C2C"/>
+                </a:solidFill>
+                <a:latin typeface="Verdana" pitchFamily="34" charset="0"/>
+                <a:ea typeface="Verdana" pitchFamily="34" charset="-122"/>
+                <a:cs typeface="Verdana" pitchFamily="34" charset="-120"/>
+              </a:rPr>
+              <a:t> Try 10 rounds. Try a deeper hum.</a:t>
+            </a:r>
+            <a:endParaRPr lang="en-US" sz="1200" dirty="0"/>
+          </a:p>
+          <a:p>
+            <a:pPr algn="l" marL="342900" indent="-342900">
+              <a:lnSpc>
+                <a:spcPts val="1620"/>
+              </a:lnSpc>
+              <a:spcAft>
+                <a:spcPts val="300"/>
+              </a:spcAft>
+              <a:buSzPct val="100000"/>
+              <a:buChar char="•"/>
+            </a:pPr>
+            <a:r>
+              <a:rPr lang="en-US" sz="1200" b="1" dirty="0">
+                <a:solidFill>
+                  <a:srgbClr val="2C2C2C"/>
+                </a:solidFill>
+                <a:latin typeface="Verdana" pitchFamily="34" charset="0"/>
+                <a:ea typeface="Verdana" pitchFamily="34" charset="-122"/>
+                <a:cs typeface="Verdana" pitchFamily="34" charset="-120"/>
+              </a:rPr>
+              <a:t>Tier down:</a:t>
+            </a:r>
+            <a:pPr algn="l" indent="0" marL="0">
+              <a:lnSpc>
+                <a:spcPts val="1620"/>
+              </a:lnSpc>
+              <a:spcAft>
+                <a:spcPts val="300"/>
+              </a:spcAft>
+              <a:buNone/>
+            </a:pPr>
+            <a:r>
+              <a:rPr lang="en-US" sz="1200" dirty="0">
+                <a:solidFill>
+                  <a:srgbClr val="2C2C2C"/>
+                </a:solidFill>
+                <a:latin typeface="Verdana" pitchFamily="34" charset="0"/>
+                <a:ea typeface="Verdana" pitchFamily="34" charset="-122"/>
+                <a:cs typeface="Verdana" pitchFamily="34" charset="-120"/>
+              </a:rPr>
+              <a:t> Just normal slow breathing if humming feels uncomfortable.</a:t>
+            </a:r>
+            <a:endParaRPr lang="en-US" sz="1200" dirty="0"/>
+          </a:p>
+        </p:txBody>
+      </p:sp>
+      <p:sp>
+        <p:nvSpPr>
+          <p:cNvPr id="5" name="Text 3"/>
+          <p:cNvSpPr/>
+          <p:nvPr/>
+        </p:nvSpPr>
+        <p:spPr>
+          <a:xfrm>
+            <a:off x="406301" y="4434929"/>
+            <a:ext cx="8498026" cy="213271"/>
+          </a:xfrm>
+          <a:prstGeom prst="rect">
+            <a:avLst/>
+          </a:prstGeom>
+          <a:noFill/>
+          <a:ln/>
+        </p:spPr>
+        <p:txBody>
+          <a:bodyPr wrap="square" lIns="0" tIns="0" rIns="0" bIns="0" rtlCol="0" anchor="t"/>
+          <a:lstStyle/>
+          <a:p>
+            <a:pPr algn="l" indent="0" marL="0">
+              <a:lnSpc>
+                <a:spcPts val="1680"/>
+              </a:lnSpc>
+              <a:spcBef>
+                <a:spcPts val="300"/>
+              </a:spcBef>
+              <a:spcAft>
+                <a:spcPts val="300"/>
+              </a:spcAft>
+              <a:buNone/>
+            </a:pPr>
+            <a:r>
+              <a:rPr lang="en-US" sz="1200" dirty="0">
+                <a:solidFill>
+                  <a:srgbClr val="2C2C2C"/>
+                </a:solidFill>
+                <a:latin typeface="Verdana" pitchFamily="34" charset="0"/>
+                <a:ea typeface="Verdana" pitchFamily="34" charset="-122"/>
+                <a:cs typeface="Verdana" pitchFamily="34" charset="-120"/>
+              </a:rPr>
+              <a:t>Primary ·  · IKS Curriculum</a:t>
+            </a:r>
+            <a:endParaRPr lang="en-US" sz="1200" dirty="0"/>
+          </a:p>
+        </p:txBody>
+      </p:sp>
+    </p:spTree>
+  </p:cSld>
+  <p:clrMapOvr>
+    <a:masterClrMapping/>
+  </p:clrMapOvr>
+</p:sld>
+</file>
+
+<file path=ppt/slides/slide13.xml><?xml version="1.0" encoding="utf-8"?>
+<p:sld xmlns:a="http://schemas.openxmlformats.org/drawingml/2006/main" xmlns:r="http://schemas.openxmlformats.org/officeDocument/2006/relationships" xmlns:p="http://schemas.openxmlformats.org/presentationml/2006/main">
+  <p:cSld name="Slide 13">
+    <p:bg>
+      <p:bgPr>
+        <a:solidFill>
+          <a:srgbClr val="FAF7F2"/>
+        </a:solidFill>
+      </p:bgPr>
+    </p:bg>
+    <p:spTree>
+      <p:nvGrpSpPr>
+        <p:cNvPr id="1" name=""/>
+        <p:cNvGrpSpPr/>
+        <p:nvPr/>
+      </p:nvGrpSpPr>
+      <p:grpSpPr>
+        <a:xfrm>
+          <a:off x="0" y="0"/>
+          <a:ext cx="0" cy="0"/>
+          <a:chOff x="0" y="0"/>
+          <a:chExt cx="0" cy="0"/>
+        </a:xfrm>
+      </p:grpSpPr>
+      <p:sp>
+        <p:nvSpPr>
+          <p:cNvPr id="2" name="Text 0"/>
+          <p:cNvSpPr/>
+          <p:nvPr/>
+        </p:nvSpPr>
+        <p:spPr>
+          <a:xfrm>
+            <a:off x="0" y="0"/>
+            <a:ext cx="9144000" cy="101501"/>
+          </a:xfrm>
+          <a:prstGeom prst="rect">
+            <a:avLst/>
+          </a:prstGeom>
+          <a:solidFill>
+            <a:srgbClr val="87A96B"/>
+          </a:solidFill>
+          <a:ln/>
+        </p:spPr>
+        <p:txBody>
+          <a:bodyPr wrap="square" rtlCol="0" anchor="ctr"/>
+          <a:lstStyle/>
+          <a:p>
+            <a:pPr indent="0" marL="0">
+              <a:buNone/>
+            </a:pPr>
+            <a:endParaRPr lang="en-US" dirty="0"/>
+          </a:p>
+        </p:txBody>
+      </p:sp>
+      <p:sp>
+        <p:nvSpPr>
+          <p:cNvPr id="3" name="Text 1"/>
+          <p:cNvSpPr/>
+          <p:nvPr/>
+        </p:nvSpPr>
+        <p:spPr>
+          <a:xfrm>
+            <a:off x="406301" y="457051"/>
+            <a:ext cx="8498026" cy="274290"/>
+          </a:xfrm>
+          <a:prstGeom prst="rect">
+            <a:avLst/>
+          </a:prstGeom>
+          <a:noFill/>
+          <a:ln/>
+        </p:spPr>
+        <p:txBody>
+          <a:bodyPr wrap="square" lIns="0" tIns="0" rIns="0" bIns="0" rtlCol="0" anchor="t"/>
+          <a:lstStyle/>
+          <a:p>
+            <a:pPr algn="l" indent="0" marL="0">
+              <a:lnSpc>
+                <a:spcPts val="2160"/>
+              </a:lnSpc>
+              <a:spcBef>
+                <a:spcPts val="600"/>
+              </a:spcBef>
+              <a:spcAft>
+                <a:spcPts val="800"/>
+              </a:spcAft>
+              <a:buNone/>
+            </a:pPr>
+            <a:r>
+              <a:rPr lang="en-US" sz="1800" b="1" dirty="0">
+                <a:solidFill>
+                  <a:srgbClr val="E07A5F"/>
+                </a:solidFill>
+                <a:latin typeface="Georgia" pitchFamily="34" charset="0"/>
+                <a:ea typeface="Georgia" pitchFamily="34" charset="-122"/>
+                <a:cs typeface="Georgia" pitchFamily="34" charset="-120"/>
+              </a:rPr>
+              <a:t>Teacher's quick notes</a:t>
+            </a:r>
+            <a:endParaRPr lang="en-US" sz="1800" dirty="0"/>
+          </a:p>
+        </p:txBody>
+      </p:sp>
+      <p:sp>
+        <p:nvSpPr>
+          <p:cNvPr id="4" name="Text 2"/>
+          <p:cNvSpPr/>
+          <p:nvPr/>
+        </p:nvSpPr>
+        <p:spPr>
+          <a:xfrm>
+            <a:off x="634901" y="883593"/>
+            <a:ext cx="8102798" cy="975122"/>
+          </a:xfrm>
+          <a:prstGeom prst="rect">
+            <a:avLst/>
+          </a:prstGeom>
+          <a:noFill/>
+          <a:ln/>
+        </p:spPr>
+        <p:txBody>
+          <a:bodyPr wrap="square" lIns="0" tIns="0" rIns="0" bIns="0" rtlCol="0" anchor="t"/>
+          <a:lstStyle/>
+          <a:p>
+            <a:pPr algn="l" marL="342900" indent="-342900">
+              <a:lnSpc>
+                <a:spcPts val="1620"/>
+              </a:lnSpc>
+              <a:spcAft>
+                <a:spcPts val="300"/>
+              </a:spcAft>
+              <a:buSzPct val="100000"/>
+              <a:buChar char="•"/>
+            </a:pPr>
+            <a:r>
+              <a:rPr lang="en-US" sz="1200" dirty="0">
+                <a:solidFill>
+                  <a:srgbClr val="2C2C2C"/>
+                </a:solidFill>
+                <a:latin typeface="Verdana" pitchFamily="34" charset="0"/>
+                <a:ea typeface="Verdana" pitchFamily="34" charset="-122"/>
+                <a:cs typeface="Verdana" pitchFamily="34" charset="-120"/>
+              </a:rPr>
+              <a:t>Asthma alert — if a child has asthma, they do natural breath, no bhrāmarī.</a:t>
+            </a:r>
+            <a:endParaRPr lang="en-US" sz="1200" dirty="0"/>
+          </a:p>
+          <a:p>
+            <a:pPr algn="l" marL="342900" indent="-342900">
+              <a:lnSpc>
+                <a:spcPts val="1620"/>
+              </a:lnSpc>
+              <a:spcAft>
+                <a:spcPts val="300"/>
+              </a:spcAft>
+              <a:buSzPct val="100000"/>
+              <a:buChar char="•"/>
+            </a:pPr>
+            <a:r>
+              <a:rPr lang="en-US" sz="1200" dirty="0">
+                <a:solidFill>
+                  <a:srgbClr val="2C2C2C"/>
+                </a:solidFill>
+                <a:latin typeface="Verdana" pitchFamily="34" charset="0"/>
+                <a:ea typeface="Verdana" pitchFamily="34" charset="-122"/>
+                <a:cs typeface="Verdana" pitchFamily="34" charset="-120"/>
+              </a:rPr>
+              <a:t>The "buzzing in the head" is a real sensation — vibration calms the nervous system.</a:t>
+            </a:r>
+            <a:endParaRPr lang="en-US" sz="1200" dirty="0"/>
+          </a:p>
+          <a:p>
+            <a:pPr algn="l" marL="342900" indent="-342900">
+              <a:lnSpc>
+                <a:spcPts val="1620"/>
+              </a:lnSpc>
+              <a:spcAft>
+                <a:spcPts val="300"/>
+              </a:spcAft>
+              <a:buSzPct val="100000"/>
+              <a:buChar char="•"/>
+            </a:pPr>
+            <a:r>
+              <a:rPr lang="en-US" sz="1200" dirty="0">
+                <a:solidFill>
+                  <a:srgbClr val="2C2C2C"/>
+                </a:solidFill>
+                <a:latin typeface="Verdana" pitchFamily="34" charset="0"/>
+                <a:ea typeface="Verdana" pitchFamily="34" charset="-122"/>
+                <a:cs typeface="Verdana" pitchFamily="34" charset="-120"/>
+              </a:rPr>
+              <a:t>Some children won't want to make sound in front of others. They can hum very quietly or just exhale slowly.</a:t>
             </a:r>
             <a:endParaRPr lang="en-US" sz="1200" dirty="0"/>
           </a:p>
@@ -2725,7 +3217,7 @@
                 <a:ea typeface="Georgia" pitchFamily="34" charset="-122"/>
                 <a:cs typeface="Georgia" pitchFamily="34" charset="-120"/>
               </a:rPr>
-              <a:t>Materials</a:t>
+              <a:t>Goal</a:t>
             </a:r>
             <a:endParaRPr lang="en-US" sz="1800" dirty="0"/>
           </a:p>
@@ -2773,45 +3265,22 @@
                 <a:ea typeface="Verdana" pitchFamily="34" charset="-122"/>
                 <a:cs typeface="Verdana" pitchFamily="34" charset="-120"/>
               </a:rPr>
-              <a:t>– Mats</a:t>
-            </a:r>
-            <a:endParaRPr lang="en-US" sz="1200" dirty="0"/>
-          </a:p>
-        </p:txBody>
-      </p:sp>
-      <p:sp>
-        <p:nvSpPr>
-          <p:cNvPr id="5" name="Text 3"/>
-          <p:cNvSpPr/>
-          <p:nvPr/>
-        </p:nvSpPr>
-        <p:spPr>
-          <a:xfrm>
-            <a:off x="634901" y="1173063"/>
-            <a:ext cx="8102798" cy="281880"/>
-          </a:xfrm>
-          <a:prstGeom prst="rect">
-            <a:avLst/>
-          </a:prstGeom>
-          <a:noFill/>
-          <a:ln/>
-        </p:spPr>
-        <p:txBody>
-          <a:bodyPr wrap="square" lIns="0" tIns="0" rIns="0" bIns="0" rtlCol="0" anchor="t"/>
-          <a:lstStyle/>
-          <a:p>
-            <a:pPr algn="l" marL="342900" indent="-342900">
-              <a:lnSpc>
-                <a:spcPts val="1620"/>
-              </a:lnSpc>
-              <a:spcAft>
-                <a:spcPts val="300"/>
-              </a:spcAft>
-              <a:buSzPct val="100000"/>
-              <a:buChar char="•"/>
-            </a:pPr>
-            <a:r>
-              <a:rPr lang="en-US" sz="1200" dirty="0">
+              <a:t>Children practise </a:t>
+            </a:r>
+            <a:pPr algn="l" indent="0" marL="0">
+              <a:lnSpc>
+                <a:spcPts val="1680"/>
+              </a:lnSpc>
+              <a:spcBef>
+                <a:spcPts val="300"/>
+              </a:spcBef>
+              <a:spcAft>
+                <a:spcPts val="300"/>
+              </a:spcAft>
+              <a:buNone/>
+            </a:pPr>
+            <a:r>
+              <a:rPr lang="en-US" sz="1200" i="1" dirty="0">
                 <a:solidFill>
                   <a:srgbClr val="2C2C2C"/>
                 </a:solidFill>
@@ -2819,7 +3288,30 @@
                 <a:ea typeface="Verdana" pitchFamily="34" charset="-122"/>
                 <a:cs typeface="Verdana" pitchFamily="34" charset="-120"/>
               </a:rPr>
-              <a:t>(No props needed — just bodies and voices)</a:t>
+              <a:t>bhrāmarī</a:t>
+            </a:r>
+            <a:pPr algn="l" indent="0" marL="0">
+              <a:lnSpc>
+                <a:spcPts val="1680"/>
+              </a:lnSpc>
+              <a:spcBef>
+                <a:spcPts val="300"/>
+              </a:spcBef>
+              <a:spcAft>
+                <a:spcPts val="300"/>
+              </a:spcAft>
+              <a:buNone/>
+            </a:pPr>
+            <a:r>
+              <a:rPr lang="en-US" sz="1200" dirty="0">
+                <a:solidFill>
+                  <a:srgbClr val="2C2C2C"/>
+                </a:solidFill>
+                <a:latin typeface="Verdana" pitchFamily="34" charset="0"/>
+                <a:ea typeface="Verdana" pitchFamily="34" charset="-122"/>
+                <a:cs typeface="Verdana" pitchFamily="34" charset="-120"/>
+              </a:rPr>
+              <a:t> — the humming breath — and notice the buzzing sensation.</a:t>
             </a:r>
             <a:endParaRPr lang="en-US" sz="1200" dirty="0"/>
           </a:p>
@@ -2827,7 +3319,7 @@
       </p:sp>
       <p:sp>
         <p:nvSpPr>
-          <p:cNvPr id="6" name="Text 4"/>
+          <p:cNvPr id="5" name="Text 3"/>
           <p:cNvSpPr/>
           <p:nvPr/>
         </p:nvSpPr>
@@ -2977,7 +3469,7 @@
                 <a:ea typeface="Georgia" pitchFamily="34" charset="-122"/>
                 <a:cs typeface="Georgia" pitchFamily="34" charset="-120"/>
               </a:rPr>
-              <a:t>The flow</a:t>
+              <a:t>Materials</a:t>
             </a:r>
             <a:endParaRPr lang="en-US" sz="1800" dirty="0"/>
           </a:p>
@@ -2986,6 +3478,76 @@
       <p:sp>
         <p:nvSpPr>
           <p:cNvPr id="4" name="Text 2"/>
+          <p:cNvSpPr/>
+          <p:nvPr/>
+        </p:nvSpPr>
+        <p:spPr>
+          <a:xfrm>
+            <a:off x="634901" y="883593"/>
+            <a:ext cx="8102798" cy="525661"/>
+          </a:xfrm>
+          <a:prstGeom prst="rect">
+            <a:avLst/>
+          </a:prstGeom>
+          <a:noFill/>
+          <a:ln/>
+        </p:spPr>
+        <p:txBody>
+          <a:bodyPr wrap="square" lIns="0" tIns="0" rIns="0" bIns="0" rtlCol="0" anchor="t"/>
+          <a:lstStyle/>
+          <a:p>
+            <a:pPr algn="l" marL="342900" indent="-342900">
+              <a:lnSpc>
+                <a:spcPts val="1620"/>
+              </a:lnSpc>
+              <a:spcAft>
+                <a:spcPts val="300"/>
+              </a:spcAft>
+              <a:buSzPct val="100000"/>
+              <a:buChar char="•"/>
+            </a:pPr>
+            <a:r>
+              <a:rPr lang="en-US" sz="1200" dirty="0">
+                <a:solidFill>
+                  <a:srgbClr val="2C2C2C"/>
+                </a:solidFill>
+                <a:latin typeface="Verdana" pitchFamily="34" charset="0"/>
+                <a:ea typeface="Verdana" pitchFamily="34" charset="-122"/>
+                <a:cs typeface="Verdana" pitchFamily="34" charset="-120"/>
+              </a:rPr>
+              <a:t>Mats</a:t>
+            </a:r>
+            <a:endParaRPr lang="en-US" sz="1200" dirty="0"/>
+          </a:p>
+          <a:p>
+            <a:pPr algn="l" marL="342900" indent="-342900">
+              <a:lnSpc>
+                <a:spcPts val="1620"/>
+              </a:lnSpc>
+              <a:spcAft>
+                <a:spcPts val="300"/>
+              </a:spcAft>
+              <a:buSzPct val="100000"/>
+              <a:buChar char="•"/>
+            </a:pPr>
+            <a:r>
+              <a:rPr lang="en-US" sz="1200" dirty="0">
+                <a:solidFill>
+                  <a:srgbClr val="2C2C2C"/>
+                </a:solidFill>
+                <a:latin typeface="Verdana" pitchFamily="34" charset="0"/>
+                <a:ea typeface="Verdana" pitchFamily="34" charset="-122"/>
+                <a:cs typeface="Verdana" pitchFamily="34" charset="-120"/>
+              </a:rPr>
+              <a:t>(No props needed — just bodies and voices)</a:t>
+            </a:r>
+            <a:endParaRPr lang="en-US" sz="1200" dirty="0"/>
+          </a:p>
+        </p:txBody>
+      </p:sp>
+      <p:sp>
+        <p:nvSpPr>
+          <p:cNvPr id="5" name="Text 3"/>
           <p:cNvSpPr/>
           <p:nvPr/>
         </p:nvSpPr>
@@ -3135,7 +3697,7 @@
                 <a:ea typeface="Georgia" pitchFamily="34" charset="-122"/>
                 <a:cs typeface="Georgia" pitchFamily="34" charset="-120"/>
               </a:rPr>
-              <a:t>Settle + opening tāḍāsana (3 min)</a:t>
+              <a:t>The flow</a:t>
             </a:r>
             <a:endParaRPr lang="en-US" sz="1800" dirty="0"/>
           </a:p>
@@ -3293,7 +3855,7 @@
                 <a:ea typeface="Georgia" pitchFamily="34" charset="-122"/>
                 <a:cs typeface="Georgia" pitchFamily="34" charset="-120"/>
               </a:rPr>
-              <a:t>Story (5 min)</a:t>
+              <a:t>Settle + opening tāḍāsana (3 min)</a:t>
             </a:r>
             <a:endParaRPr lang="en-US" sz="1800" dirty="0"/>
           </a:p>
@@ -3302,194 +3864,6 @@
       <p:sp>
         <p:nvSpPr>
           <p:cNvPr id="4" name="Text 2"/>
-          <p:cNvSpPr/>
-          <p:nvPr/>
-        </p:nvSpPr>
-        <p:spPr>
-          <a:xfrm>
-            <a:off x="406301" y="870942"/>
-            <a:ext cx="8498026" cy="426541"/>
-          </a:xfrm>
-          <a:prstGeom prst="rect">
-            <a:avLst/>
-          </a:prstGeom>
-          <a:noFill/>
-          <a:ln/>
-        </p:spPr>
-        <p:txBody>
-          <a:bodyPr wrap="square" lIns="0" tIns="0" rIns="0" bIns="0" rtlCol="0" anchor="t"/>
-          <a:lstStyle/>
-          <a:p>
-            <a:pPr algn="l" indent="0" marL="0">
-              <a:lnSpc>
-                <a:spcPts val="1680"/>
-              </a:lnSpc>
-              <a:spcBef>
-                <a:spcPts val="300"/>
-              </a:spcBef>
-              <a:spcAft>
-                <a:spcPts val="300"/>
-              </a:spcAft>
-              <a:buNone/>
-            </a:pPr>
-            <a:r>
-              <a:rPr lang="en-US" sz="1200" i="1" dirty="0">
-                <a:solidFill>
-                  <a:srgbClr val="2C2C2C"/>
-                </a:solidFill>
-                <a:latin typeface="Verdana" pitchFamily="34" charset="0"/>
-                <a:ea typeface="Verdana" pitchFamily="34" charset="-122"/>
-                <a:cs typeface="Verdana" pitchFamily="34" charset="-120"/>
-              </a:rPr>
-              <a:t>"Today's special practice is a </a:t>
-            </a:r>
-            <a:pPr algn="l" indent="0" marL="0">
-              <a:lnSpc>
-                <a:spcPts val="1680"/>
-              </a:lnSpc>
-              <a:spcBef>
-                <a:spcPts val="300"/>
-              </a:spcBef>
-              <a:spcAft>
-                <a:spcPts val="300"/>
-              </a:spcAft>
-              <a:buNone/>
-            </a:pPr>
-            <a:r>
-              <a:rPr lang="en-US" sz="1200" b="1" i="1" dirty="0">
-                <a:solidFill>
-                  <a:srgbClr val="2C2C2C"/>
-                </a:solidFill>
-                <a:latin typeface="Verdana" pitchFamily="34" charset="0"/>
-                <a:ea typeface="Verdana" pitchFamily="34" charset="-122"/>
-                <a:cs typeface="Verdana" pitchFamily="34" charset="-120"/>
-              </a:rPr>
-              <a:t>breath</a:t>
-            </a:r>
-            <a:pPr algn="l" indent="0" marL="0">
-              <a:lnSpc>
-                <a:spcPts val="1680"/>
-              </a:lnSpc>
-              <a:spcBef>
-                <a:spcPts val="300"/>
-              </a:spcBef>
-              <a:spcAft>
-                <a:spcPts val="300"/>
-              </a:spcAft>
-              <a:buNone/>
-            </a:pPr>
-            <a:r>
-              <a:rPr lang="en-US" sz="1200" i="1" dirty="0">
-                <a:solidFill>
-                  <a:srgbClr val="2C2C2C"/>
-                </a:solidFill>
-                <a:latin typeface="Verdana" pitchFamily="34" charset="0"/>
-                <a:ea typeface="Verdana" pitchFamily="34" charset="-122"/>
-                <a:cs typeface="Verdana" pitchFamily="34" charset="-120"/>
-              </a:rPr>
-              <a:t>, not a pose. It's called </a:t>
-            </a:r>
-            <a:pPr algn="l" indent="0" marL="0">
-              <a:lnSpc>
-                <a:spcPts val="1680"/>
-              </a:lnSpc>
-              <a:spcBef>
-                <a:spcPts val="300"/>
-              </a:spcBef>
-              <a:spcAft>
-                <a:spcPts val="300"/>
-              </a:spcAft>
-              <a:buNone/>
-            </a:pPr>
-            <a:r>
-              <a:rPr lang="en-US" sz="1200" b="1" i="1" dirty="0">
-                <a:solidFill>
-                  <a:srgbClr val="2C2C2C"/>
-                </a:solidFill>
-                <a:latin typeface="Verdana" pitchFamily="34" charset="0"/>
-                <a:ea typeface="Verdana" pitchFamily="34" charset="-122"/>
-                <a:cs typeface="Verdana" pitchFamily="34" charset="-120"/>
-              </a:rPr>
-              <a:t>bhrāmarī</a:t>
-            </a:r>
-            <a:pPr algn="l" indent="0" marL="0">
-              <a:lnSpc>
-                <a:spcPts val="1680"/>
-              </a:lnSpc>
-              <a:spcBef>
-                <a:spcPts val="300"/>
-              </a:spcBef>
-              <a:spcAft>
-                <a:spcPts val="300"/>
-              </a:spcAft>
-              <a:buNone/>
-            </a:pPr>
-            <a:r>
-              <a:rPr lang="en-US" sz="1200" i="1" dirty="0">
-                <a:solidFill>
-                  <a:srgbClr val="2C2C2C"/>
-                </a:solidFill>
-                <a:latin typeface="Verdana" pitchFamily="34" charset="0"/>
-                <a:ea typeface="Verdana" pitchFamily="34" charset="-122"/>
-                <a:cs typeface="Verdana" pitchFamily="34" charset="-120"/>
-              </a:rPr>
-              <a:t> — bumblebee breath. We hum like bees."</a:t>
-            </a:r>
-            <a:endParaRPr lang="en-US" sz="1200" dirty="0"/>
-          </a:p>
-        </p:txBody>
-      </p:sp>
-      <p:sp>
-        <p:nvSpPr>
-          <p:cNvPr id="5" name="Text 3"/>
-          <p:cNvSpPr/>
-          <p:nvPr/>
-        </p:nvSpPr>
-        <p:spPr>
-          <a:xfrm>
-            <a:off x="406301" y="1373684"/>
-            <a:ext cx="8498026" cy="213271"/>
-          </a:xfrm>
-          <a:prstGeom prst="rect">
-            <a:avLst/>
-          </a:prstGeom>
-          <a:noFill/>
-          <a:ln/>
-        </p:spPr>
-        <p:txBody>
-          <a:bodyPr wrap="square" lIns="0" tIns="0" rIns="0" bIns="0" rtlCol="0" anchor="t"/>
-          <a:lstStyle/>
-          <a:p>
-            <a:pPr algn="l" indent="0" marL="0">
-              <a:lnSpc>
-                <a:spcPts val="1680"/>
-              </a:lnSpc>
-              <a:spcBef>
-                <a:spcPts val="300"/>
-              </a:spcBef>
-              <a:spcAft>
-                <a:spcPts val="300"/>
-              </a:spcAft>
-              <a:buNone/>
-            </a:pPr>
-            <a:r>
-              <a:rPr lang="en-US" sz="1200" i="1" dirty="0">
-                <a:solidFill>
-                  <a:srgbClr val="2C2C2C"/>
-                </a:solidFill>
-                <a:latin typeface="Verdana" pitchFamily="34" charset="0"/>
-                <a:ea typeface="Verdana" pitchFamily="34" charset="-122"/>
-                <a:cs typeface="Verdana" pitchFamily="34" charset="-120"/>
-              </a:rPr>
-              <a:t>"Why bees? Because the humming feels like a buzzing in your head — it helps the mind feel quiet."</a:t>
-            </a:r>
-            <a:endParaRPr lang="en-US" sz="1200" dirty="0"/>
-          </a:p>
-        </p:txBody>
-      </p:sp>
-      <p:sp>
-        <p:nvSpPr>
-          <p:cNvPr id="6" name="Text 4"/>
           <p:cNvSpPr/>
           <p:nvPr/>
         </p:nvSpPr>
@@ -3639,7 +4013,7 @@
                 <a:ea typeface="Georgia" pitchFamily="34" charset="-122"/>
                 <a:cs typeface="Georgia" pitchFamily="34" charset="-120"/>
               </a:rPr>
-              <a:t>Bhrāmarī practice (15 min)</a:t>
+              <a:t>Story (5 min)</a:t>
             </a:r>
             <a:endParaRPr lang="en-US" sz="1800" dirty="0"/>
           </a:p>
@@ -3653,8 +4027,8 @@
         </p:nvSpPr>
         <p:spPr>
           <a:xfrm>
-            <a:off x="634901" y="883593"/>
-            <a:ext cx="8102798" cy="1013222"/>
+            <a:off x="406301" y="870942"/>
+            <a:ext cx="8498026" cy="426541"/>
           </a:xfrm>
           <a:prstGeom prst="rect">
             <a:avLst/>
@@ -3666,15 +4040,17 @@
           <a:bodyPr wrap="square" lIns="0" tIns="0" rIns="0" bIns="0" rtlCol="0" anchor="t"/>
           <a:lstStyle/>
           <a:p>
-            <a:pPr algn="l" marL="342900" indent="-342900">
-              <a:lnSpc>
-                <a:spcPts val="1620"/>
-              </a:lnSpc>
-              <a:spcAft>
-                <a:spcPts val="300"/>
-              </a:spcAft>
-              <a:buSzPct val="100000"/>
-              <a:buChar char="•"/>
+            <a:pPr algn="l" indent="0" marL="0">
+              <a:lnSpc>
+                <a:spcPts val="1680"/>
+              </a:lnSpc>
+              <a:spcBef>
+                <a:spcPts val="300"/>
+              </a:spcBef>
+              <a:spcAft>
+                <a:spcPts val="300"/>
+              </a:spcAft>
+              <a:buNone/>
             </a:pPr>
             <a:r>
               <a:rPr lang="en-US" sz="1200" i="1" dirty="0">
@@ -3685,23 +4061,22 @@
                 <a:ea typeface="Verdana" pitchFamily="34" charset="-122"/>
                 <a:cs typeface="Verdana" pitchFamily="34" charset="-120"/>
               </a:rPr>
-              <a:t>"Sit cross-legged. Hands on your knees. Back tall."</a:t>
-            </a:r>
-            <a:endParaRPr lang="en-US" sz="1200" dirty="0"/>
-          </a:p>
-          <a:p>
-            <a:pPr algn="l" marL="342900" indent="-342900">
-              <a:lnSpc>
-                <a:spcPts val="1620"/>
-              </a:lnSpc>
-              <a:spcAft>
-                <a:spcPts val="300"/>
-              </a:spcAft>
-              <a:buSzPct val="100000"/>
-              <a:buChar char="•"/>
-            </a:pPr>
-            <a:r>
-              <a:rPr lang="en-US" sz="1200" i="1" dirty="0">
+              <a:t>"Today's special practice is a </a:t>
+            </a:r>
+            <a:pPr algn="l" indent="0" marL="0">
+              <a:lnSpc>
+                <a:spcPts val="1680"/>
+              </a:lnSpc>
+              <a:spcBef>
+                <a:spcPts val="300"/>
+              </a:spcBef>
+              <a:spcAft>
+                <a:spcPts val="300"/>
+              </a:spcAft>
+              <a:buNone/>
+            </a:pPr>
+            <a:r>
+              <a:rPr lang="en-US" sz="1200" b="1" i="1" dirty="0">
                 <a:solidFill>
                   <a:srgbClr val="2C2C2C"/>
                 </a:solidFill>
@@ -3709,20 +4084,19 @@
                 <a:ea typeface="Verdana" pitchFamily="34" charset="-122"/>
                 <a:cs typeface="Verdana" pitchFamily="34" charset="-120"/>
               </a:rPr>
-              <a:t>"Take a slow breath IN."</a:t>
-            </a:r>
-            <a:endParaRPr lang="en-US" sz="1200" dirty="0"/>
-          </a:p>
-          <a:p>
-            <a:pPr algn="l" marL="342900" indent="-342900">
-              <a:lnSpc>
-                <a:spcPts val="1620"/>
-              </a:lnSpc>
-              <a:spcAft>
-                <a:spcPts val="300"/>
-              </a:spcAft>
-              <a:buSzPct val="100000"/>
-              <a:buChar char="•"/>
+              <a:t>breath</a:t>
+            </a:r>
+            <a:pPr algn="l" indent="0" marL="0">
+              <a:lnSpc>
+                <a:spcPts val="1680"/>
+              </a:lnSpc>
+              <a:spcBef>
+                <a:spcPts val="300"/>
+              </a:spcBef>
+              <a:spcAft>
+                <a:spcPts val="300"/>
+              </a:spcAft>
+              <a:buNone/>
             </a:pPr>
             <a:r>
               <a:rPr lang="en-US" sz="1200" i="1" dirty="0">
@@ -3733,23 +4107,22 @@
                 <a:ea typeface="Verdana" pitchFamily="34" charset="-122"/>
                 <a:cs typeface="Verdana" pitchFamily="34" charset="-120"/>
               </a:rPr>
-              <a:t>"As you breathe OUT, hum. 'Mmmmmmmmm.' For as long as you can."</a:t>
-            </a:r>
-            <a:endParaRPr lang="en-US" sz="1200" dirty="0"/>
-          </a:p>
-          <a:p>
-            <a:pPr algn="l" marL="342900" indent="-342900">
-              <a:lnSpc>
-                <a:spcPts val="1620"/>
-              </a:lnSpc>
-              <a:spcAft>
-                <a:spcPts val="300"/>
-              </a:spcAft>
-              <a:buSzPct val="100000"/>
-              <a:buChar char="•"/>
-            </a:pPr>
-            <a:r>
-              <a:rPr lang="en-US" sz="1200" i="1" dirty="0">
+              <a:t>, not a pose. It's called </a:t>
+            </a:r>
+            <a:pPr algn="l" indent="0" marL="0">
+              <a:lnSpc>
+                <a:spcPts val="1680"/>
+              </a:lnSpc>
+              <a:spcBef>
+                <a:spcPts val="300"/>
+              </a:spcBef>
+              <a:spcAft>
+                <a:spcPts val="300"/>
+              </a:spcAft>
+              <a:buNone/>
+            </a:pPr>
+            <a:r>
+              <a:rPr lang="en-US" sz="1200" b="1" i="1" dirty="0">
                 <a:solidFill>
                   <a:srgbClr val="2C2C2C"/>
                 </a:solidFill>
@@ -3757,7 +4130,30 @@
                 <a:ea typeface="Verdana" pitchFamily="34" charset="-122"/>
                 <a:cs typeface="Verdana" pitchFamily="34" charset="-120"/>
               </a:rPr>
-              <a:t>"Then breathe in again. Then hum again."</a:t>
+              <a:t>bhrāmarī</a:t>
+            </a:r>
+            <a:pPr algn="l" indent="0" marL="0">
+              <a:lnSpc>
+                <a:spcPts val="1680"/>
+              </a:lnSpc>
+              <a:spcBef>
+                <a:spcPts val="300"/>
+              </a:spcBef>
+              <a:spcAft>
+                <a:spcPts val="300"/>
+              </a:spcAft>
+              <a:buNone/>
+            </a:pPr>
+            <a:r>
+              <a:rPr lang="en-US" sz="1200" i="1" dirty="0">
+                <a:solidFill>
+                  <a:srgbClr val="2C2C2C"/>
+                </a:solidFill>
+                <a:latin typeface="Verdana" pitchFamily="34" charset="0"/>
+                <a:ea typeface="Verdana" pitchFamily="34" charset="-122"/>
+                <a:cs typeface="Verdana" pitchFamily="34" charset="-120"/>
+              </a:rPr>
+              <a:t> — bumblebee breath. We hum like bees."</a:t>
             </a:r>
             <a:endParaRPr lang="en-US" sz="1200" dirty="0"/>
           </a:p>
@@ -3771,7 +4167,7 @@
         </p:nvSpPr>
         <p:spPr>
           <a:xfrm>
-            <a:off x="406301" y="1985665"/>
+            <a:off x="406301" y="1373684"/>
             <a:ext cx="8498026" cy="213271"/>
           </a:xfrm>
           <a:prstGeom prst="rect">
@@ -3797,7 +4193,7 @@
               <a:buNone/>
             </a:pPr>
             <a:r>
-              <a:rPr lang="en-US" sz="1200" dirty="0">
+              <a:rPr lang="en-US" sz="1200" i="1" dirty="0">
                 <a:solidFill>
                   <a:srgbClr val="2C2C2C"/>
                 </a:solidFill>
@@ -3805,7 +4201,7 @@
                 <a:ea typeface="Verdana" pitchFamily="34" charset="-122"/>
                 <a:cs typeface="Verdana" pitchFamily="34" charset="-120"/>
               </a:rPr>
-              <a:t>Do 5 rounds together.</a:t>
+              <a:t>"Why bees? Because the humming feels like a buzzing in your head — it helps the mind feel quiet."</a:t>
             </a:r>
             <a:endParaRPr lang="en-US" sz="1200" dirty="0"/>
           </a:p>
@@ -3814,125 +4210,6 @@
       <p:sp>
         <p:nvSpPr>
           <p:cNvPr id="6" name="Text 4"/>
-          <p:cNvSpPr/>
-          <p:nvPr/>
-        </p:nvSpPr>
-        <p:spPr>
-          <a:xfrm>
-            <a:off x="406301" y="2275136"/>
-            <a:ext cx="8498026" cy="426541"/>
-          </a:xfrm>
-          <a:prstGeom prst="rect">
-            <a:avLst/>
-          </a:prstGeom>
-          <a:noFill/>
-          <a:ln/>
-        </p:spPr>
-        <p:txBody>
-          <a:bodyPr wrap="square" lIns="0" tIns="0" rIns="0" bIns="0" rtlCol="0" anchor="t"/>
-          <a:lstStyle/>
-          <a:p>
-            <a:pPr algn="l" indent="0" marL="0">
-              <a:lnSpc>
-                <a:spcPts val="1680"/>
-              </a:lnSpc>
-              <a:spcBef>
-                <a:spcPts val="300"/>
-              </a:spcBef>
-              <a:spcAft>
-                <a:spcPts val="300"/>
-              </a:spcAft>
-              <a:buNone/>
-            </a:pPr>
-            <a:r>
-              <a:rPr lang="en-US" sz="1200" dirty="0">
-                <a:solidFill>
-                  <a:srgbClr val="2C2C2C"/>
-                </a:solidFill>
-                <a:latin typeface="Verdana" pitchFamily="34" charset="0"/>
-                <a:ea typeface="Verdana" pitchFamily="34" charset="-122"/>
-                <a:cs typeface="Verdana" pitchFamily="34" charset="-120"/>
-              </a:rPr>
-              <a:t>Then try ONE round with hands gently covering the ears (just close the ear flaps with fingers). </a:t>
-            </a:r>
-            <a:pPr algn="l" indent="0" marL="0">
-              <a:lnSpc>
-                <a:spcPts val="1680"/>
-              </a:lnSpc>
-              <a:spcBef>
-                <a:spcPts val="300"/>
-              </a:spcBef>
-              <a:spcAft>
-                <a:spcPts val="300"/>
-              </a:spcAft>
-              <a:buNone/>
-            </a:pPr>
-            <a:r>
-              <a:rPr lang="en-US" sz="1200" i="1" dirty="0">
-                <a:solidFill>
-                  <a:srgbClr val="2C2C2C"/>
-                </a:solidFill>
-                <a:latin typeface="Verdana" pitchFamily="34" charset="0"/>
-                <a:ea typeface="Verdana" pitchFamily="34" charset="-122"/>
-                <a:cs typeface="Verdana" pitchFamily="34" charset="-120"/>
-              </a:rPr>
-              <a:t>"Now your hum sounds extra loud — like bees inside your head!"</a:t>
-            </a:r>
-            <a:endParaRPr lang="en-US" sz="1200" dirty="0"/>
-          </a:p>
-        </p:txBody>
-      </p:sp>
-      <p:sp>
-        <p:nvSpPr>
-          <p:cNvPr id="7" name="Text 5"/>
-          <p:cNvSpPr/>
-          <p:nvPr/>
-        </p:nvSpPr>
-        <p:spPr>
-          <a:xfrm>
-            <a:off x="406301" y="2777877"/>
-            <a:ext cx="8498026" cy="213271"/>
-          </a:xfrm>
-          <a:prstGeom prst="rect">
-            <a:avLst/>
-          </a:prstGeom>
-          <a:noFill/>
-          <a:ln/>
-        </p:spPr>
-        <p:txBody>
-          <a:bodyPr wrap="square" lIns="0" tIns="0" rIns="0" bIns="0" rtlCol="0" anchor="t"/>
-          <a:lstStyle/>
-          <a:p>
-            <a:pPr algn="l" indent="0" marL="0">
-              <a:lnSpc>
-                <a:spcPts val="1680"/>
-              </a:lnSpc>
-              <a:spcBef>
-                <a:spcPts val="300"/>
-              </a:spcBef>
-              <a:spcAft>
-                <a:spcPts val="300"/>
-              </a:spcAft>
-              <a:buNone/>
-            </a:pPr>
-            <a:r>
-              <a:rPr lang="en-US" sz="1200" dirty="0">
-                <a:solidFill>
-                  <a:srgbClr val="2C2C2C"/>
-                </a:solidFill>
-                <a:latin typeface="Verdana" pitchFamily="34" charset="0"/>
-                <a:ea typeface="Verdana" pitchFamily="34" charset="-122"/>
-                <a:cs typeface="Verdana" pitchFamily="34" charset="-120"/>
-              </a:rPr>
-              <a:t>Do 3 rounds with ears covered.</a:t>
-            </a:r>
-            <a:endParaRPr lang="en-US" sz="1200" dirty="0"/>
-          </a:p>
-        </p:txBody>
-      </p:sp>
-      <p:sp>
-        <p:nvSpPr>
-          <p:cNvPr id="8" name="Text 6"/>
           <p:cNvSpPr/>
           <p:nvPr/>
         </p:nvSpPr>
@@ -4082,7 +4359,7 @@
                 <a:ea typeface="Georgia" pitchFamily="34" charset="-122"/>
                 <a:cs typeface="Georgia" pitchFamily="34" charset="-120"/>
               </a:rPr>
-              <a:t>Reflection (5 min)</a:t>
+              <a:t>Bhrāmarī practice (15 min)</a:t>
             </a:r>
             <a:endParaRPr lang="en-US" sz="1800" dirty="0"/>
           </a:p>
@@ -4097,7 +4374,7 @@
         <p:spPr>
           <a:xfrm>
             <a:off x="634901" y="883593"/>
-            <a:ext cx="8102798" cy="525661"/>
+            <a:ext cx="8102798" cy="1013222"/>
           </a:xfrm>
           <a:prstGeom prst="rect">
             <a:avLst/>
@@ -4128,7 +4405,7 @@
                 <a:ea typeface="Verdana" pitchFamily="34" charset="-122"/>
                 <a:cs typeface="Verdana" pitchFamily="34" charset="-120"/>
               </a:rPr>
-              <a:t>"How did your head feel after the buzzing?"</a:t>
+              <a:t>"Sit cross-legged. Hands on your knees. Back tall."</a:t>
             </a:r>
             <a:endParaRPr lang="en-US" sz="1200" dirty="0"/>
           </a:p>
@@ -4152,15 +4429,111 @@
                 <a:ea typeface="Verdana" pitchFamily="34" charset="-122"/>
                 <a:cs typeface="Verdana" pitchFamily="34" charset="-120"/>
               </a:rPr>
-              <a:t>"Was it easier or harder than counting breaths?"</a:t>
+              <a:t>"Take a slow breath IN."</a:t>
             </a:r>
             <a:endParaRPr lang="en-US" sz="1200" dirty="0"/>
           </a:p>
+          <a:p>
+            <a:pPr algn="l" marL="342900" indent="-342900">
+              <a:lnSpc>
+                <a:spcPts val="1620"/>
+              </a:lnSpc>
+              <a:spcAft>
+                <a:spcPts val="300"/>
+              </a:spcAft>
+              <a:buSzPct val="100000"/>
+              <a:buChar char="•"/>
+            </a:pPr>
+            <a:r>
+              <a:rPr lang="en-US" sz="1200" i="1" dirty="0">
+                <a:solidFill>
+                  <a:srgbClr val="2C2C2C"/>
+                </a:solidFill>
+                <a:latin typeface="Verdana" pitchFamily="34" charset="0"/>
+                <a:ea typeface="Verdana" pitchFamily="34" charset="-122"/>
+                <a:cs typeface="Verdana" pitchFamily="34" charset="-120"/>
+              </a:rPr>
+              <a:t>"As you breathe OUT, hum. 'Mmmmmmmmm.' For as long as you can."</a:t>
+            </a:r>
+            <a:endParaRPr lang="en-US" sz="1200" dirty="0"/>
+          </a:p>
+          <a:p>
+            <a:pPr algn="l" marL="342900" indent="-342900">
+              <a:lnSpc>
+                <a:spcPts val="1620"/>
+              </a:lnSpc>
+              <a:spcAft>
+                <a:spcPts val="300"/>
+              </a:spcAft>
+              <a:buSzPct val="100000"/>
+              <a:buChar char="•"/>
+            </a:pPr>
+            <a:r>
+              <a:rPr lang="en-US" sz="1200" i="1" dirty="0">
+                <a:solidFill>
+                  <a:srgbClr val="2C2C2C"/>
+                </a:solidFill>
+                <a:latin typeface="Verdana" pitchFamily="34" charset="0"/>
+                <a:ea typeface="Verdana" pitchFamily="34" charset="-122"/>
+                <a:cs typeface="Verdana" pitchFamily="34" charset="-120"/>
+              </a:rPr>
+              <a:t>"Then breathe in again. Then hum again."</a:t>
+            </a:r>
+            <a:endParaRPr lang="en-US" sz="1200" dirty="0"/>
+          </a:p>
         </p:txBody>
       </p:sp>
       <p:sp>
         <p:nvSpPr>
           <p:cNvPr id="5" name="Text 3"/>
+          <p:cNvSpPr/>
+          <p:nvPr/>
+        </p:nvSpPr>
+        <p:spPr>
+          <a:xfrm>
+            <a:off x="406301" y="1985665"/>
+            <a:ext cx="8498026" cy="213271"/>
+          </a:xfrm>
+          <a:prstGeom prst="rect">
+            <a:avLst/>
+          </a:prstGeom>
+          <a:noFill/>
+          <a:ln/>
+        </p:spPr>
+        <p:txBody>
+          <a:bodyPr wrap="square" lIns="0" tIns="0" rIns="0" bIns="0" rtlCol="0" anchor="t"/>
+          <a:lstStyle/>
+          <a:p>
+            <a:pPr algn="l" indent="0" marL="0">
+              <a:lnSpc>
+                <a:spcPts val="1680"/>
+              </a:lnSpc>
+              <a:spcBef>
+                <a:spcPts val="300"/>
+              </a:spcBef>
+              <a:spcAft>
+                <a:spcPts val="300"/>
+              </a:spcAft>
+              <a:buNone/>
+            </a:pPr>
+            <a:r>
+              <a:rPr lang="en-US" sz="1200" dirty="0">
+                <a:solidFill>
+                  <a:srgbClr val="2C2C2C"/>
+                </a:solidFill>
+                <a:latin typeface="Verdana" pitchFamily="34" charset="0"/>
+                <a:ea typeface="Verdana" pitchFamily="34" charset="-122"/>
+                <a:cs typeface="Verdana" pitchFamily="34" charset="-120"/>
+              </a:rPr>
+              <a:t>Do 5 rounds together.</a:t>
+            </a:r>
+            <a:endParaRPr lang="en-US" sz="1200" dirty="0"/>
+          </a:p>
+        </p:txBody>
+      </p:sp>
+      <p:sp>
+        <p:nvSpPr>
+          <p:cNvPr id="6" name="Text 4"/>
           <p:cNvSpPr/>
           <p:nvPr/>
         </p:nvSpPr>
@@ -4310,7 +4683,7 @@
                 <a:ea typeface="Georgia" pitchFamily="34" charset="-122"/>
                 <a:cs typeface="Georgia" pitchFamily="34" charset="-120"/>
               </a:rPr>
-              <a:t>Close (2 min)</a:t>
+              <a:t>Bhrāmarī practice (15 min) (cont.)</a:t>
             </a:r>
             <a:endParaRPr lang="en-US" sz="1800" dirty="0"/>
           </a:p>
@@ -4325,7 +4698,7 @@
         <p:spPr>
           <a:xfrm>
             <a:off x="406301" y="870942"/>
-            <a:ext cx="8498026" cy="213271"/>
+            <a:ext cx="8498026" cy="426541"/>
           </a:xfrm>
           <a:prstGeom prst="rect">
             <a:avLst/>
@@ -4358,7 +4731,30 @@
                 <a:ea typeface="Verdana" pitchFamily="34" charset="-122"/>
                 <a:cs typeface="Verdana" pitchFamily="34" charset="-120"/>
               </a:rPr>
-              <a:t>Tāḍāsana. Namaste.</a:t>
+              <a:t>Then try ONE round with hands gently covering the ears (just close the ear flaps with fingers). </a:t>
+            </a:r>
+            <a:pPr algn="l" indent="0" marL="0">
+              <a:lnSpc>
+                <a:spcPts val="1680"/>
+              </a:lnSpc>
+              <a:spcBef>
+                <a:spcPts val="300"/>
+              </a:spcBef>
+              <a:spcAft>
+                <a:spcPts val="300"/>
+              </a:spcAft>
+              <a:buNone/>
+            </a:pPr>
+            <a:r>
+              <a:rPr lang="en-US" sz="1200" i="1" dirty="0">
+                <a:solidFill>
+                  <a:srgbClr val="2C2C2C"/>
+                </a:solidFill>
+                <a:latin typeface="Verdana" pitchFamily="34" charset="0"/>
+                <a:ea typeface="Verdana" pitchFamily="34" charset="-122"/>
+                <a:cs typeface="Verdana" pitchFamily="34" charset="-120"/>
+              </a:rPr>
+              <a:t>"Now your hum sounds extra loud — like bees inside your head!"</a:t>
             </a:r>
             <a:endParaRPr lang="en-US" sz="1200" dirty="0"/>
           </a:p>
@@ -4367,6 +4763,54 @@
       <p:sp>
         <p:nvSpPr>
           <p:cNvPr id="5" name="Text 3"/>
+          <p:cNvSpPr/>
+          <p:nvPr/>
+        </p:nvSpPr>
+        <p:spPr>
+          <a:xfrm>
+            <a:off x="406301" y="1373684"/>
+            <a:ext cx="8498026" cy="213271"/>
+          </a:xfrm>
+          <a:prstGeom prst="rect">
+            <a:avLst/>
+          </a:prstGeom>
+          <a:noFill/>
+          <a:ln/>
+        </p:spPr>
+        <p:txBody>
+          <a:bodyPr wrap="square" lIns="0" tIns="0" rIns="0" bIns="0" rtlCol="0" anchor="t"/>
+          <a:lstStyle/>
+          <a:p>
+            <a:pPr algn="l" indent="0" marL="0">
+              <a:lnSpc>
+                <a:spcPts val="1680"/>
+              </a:lnSpc>
+              <a:spcBef>
+                <a:spcPts val="300"/>
+              </a:spcBef>
+              <a:spcAft>
+                <a:spcPts val="300"/>
+              </a:spcAft>
+              <a:buNone/>
+            </a:pPr>
+            <a:r>
+              <a:rPr lang="en-US" sz="1200" dirty="0">
+                <a:solidFill>
+                  <a:srgbClr val="2C2C2C"/>
+                </a:solidFill>
+                <a:latin typeface="Verdana" pitchFamily="34" charset="0"/>
+                <a:ea typeface="Verdana" pitchFamily="34" charset="-122"/>
+                <a:cs typeface="Verdana" pitchFamily="34" charset="-120"/>
+              </a:rPr>
+              <a:t>Do 3 rounds with ears covered.</a:t>
+            </a:r>
+            <a:endParaRPr lang="en-US" sz="1200" dirty="0"/>
+          </a:p>
+        </p:txBody>
+      </p:sp>
+      <p:sp>
+        <p:nvSpPr>
+          <p:cNvPr id="6" name="Text 4"/>
           <p:cNvSpPr/>
           <p:nvPr/>
         </p:nvSpPr>
@@ -4516,7 +4960,7 @@
                 <a:ea typeface="Georgia" pitchFamily="34" charset="-122"/>
                 <a:cs typeface="Georgia" pitchFamily="34" charset="-120"/>
               </a:rPr>
-              <a:t>Homework</a:t>
+              <a:t>Reflection (5 min)</a:t>
             </a:r>
             <a:endParaRPr lang="en-US" sz="1800" dirty="0"/>
           </a:p>
@@ -4530,8 +4974,8 @@
         </p:nvSpPr>
         <p:spPr>
           <a:xfrm>
-            <a:off x="406301" y="870942"/>
-            <a:ext cx="8498026" cy="213271"/>
+            <a:off x="634901" y="883593"/>
+            <a:ext cx="8102798" cy="525661"/>
           </a:xfrm>
           <a:prstGeom prst="rect">
             <a:avLst/>
@@ -4543,20 +4987,18 @@
           <a:bodyPr wrap="square" lIns="0" tIns="0" rIns="0" bIns="0" rtlCol="0" anchor="t"/>
           <a:lstStyle/>
           <a:p>
-            <a:pPr algn="l" indent="0" marL="0">
-              <a:lnSpc>
-                <a:spcPts val="1680"/>
-              </a:lnSpc>
-              <a:spcBef>
-                <a:spcPts val="300"/>
-              </a:spcBef>
-              <a:spcAft>
-                <a:spcPts val="300"/>
-              </a:spcAft>
-              <a:buNone/>
-            </a:pPr>
-            <a:r>
-              <a:rPr lang="en-US" sz="1200" dirty="0">
+            <a:pPr algn="l" marL="342900" indent="-342900">
+              <a:lnSpc>
+                <a:spcPts val="1620"/>
+              </a:lnSpc>
+              <a:spcAft>
+                <a:spcPts val="300"/>
+              </a:spcAft>
+              <a:buSzPct val="100000"/>
+              <a:buChar char="•"/>
+            </a:pPr>
+            <a:r>
+              <a:rPr lang="en-US" sz="1200" i="1" dirty="0">
                 <a:solidFill>
                   <a:srgbClr val="2C2C2C"/>
                 </a:solidFill>
@@ -4564,7 +5006,31 @@
                 <a:ea typeface="Verdana" pitchFamily="34" charset="-122"/>
                 <a:cs typeface="Verdana" pitchFamily="34" charset="-120"/>
               </a:rPr>
-              <a:t>– 5 bumblebee breaths before bedtime tonight. Notice how you feel.</a:t>
+              <a:t>"How did your head feel after the buzzing?"</a:t>
+            </a:r>
+            <a:endParaRPr lang="en-US" sz="1200" dirty="0"/>
+          </a:p>
+          <a:p>
+            <a:pPr algn="l" marL="342900" indent="-342900">
+              <a:lnSpc>
+                <a:spcPts val="1620"/>
+              </a:lnSpc>
+              <a:spcAft>
+                <a:spcPts val="300"/>
+              </a:spcAft>
+              <a:buSzPct val="100000"/>
+              <a:buChar char="•"/>
+            </a:pPr>
+            <a:r>
+              <a:rPr lang="en-US" sz="1200" i="1" dirty="0">
+                <a:solidFill>
+                  <a:srgbClr val="2C2C2C"/>
+                </a:solidFill>
+                <a:latin typeface="Verdana" pitchFamily="34" charset="0"/>
+                <a:ea typeface="Verdana" pitchFamily="34" charset="-122"/>
+                <a:cs typeface="Verdana" pitchFamily="34" charset="-120"/>
+              </a:rPr>
+              <a:t>"Was it easier or harder than counting breaths?"</a:t>
             </a:r>
             <a:endParaRPr lang="en-US" sz="1200" dirty="0"/>
           </a:p>
